--- a/Projekti esitlus - Kinnisvara statistika.pptx
+++ b/Projekti esitlus - Kinnisvara statistika.pptx
@@ -5848,7 +5848,7 @@
           <a:p>
             <a:fld id="{0DC994AA-C437-4EF4-8BEF-0B832D7FA420}" type="datetimeFigureOut">
               <a:rPr lang="en-US" smtClean="0"/>
-              <a:t>12/9/2024</a:t>
+              <a:t>12/10/2024</a:t>
             </a:fld>
             <a:endParaRPr lang="en-US"/>
           </a:p>
@@ -5984,7 +5984,7 @@
           <a:p>
             <a:fld id="{38B16356-3B28-4AAF-8099-7941810E2475}" type="datetimeFigureOut">
               <a:rPr lang="en-US" smtClean="0"/>
-              <a:t>12/9/2024</a:t>
+              <a:t>12/10/2024</a:t>
             </a:fld>
             <a:endParaRPr lang="en-US"/>
           </a:p>
@@ -7331,7 +7331,7 @@
           <a:p>
             <a:fld id="{D6D8061D-18C3-4F4F-85EF-561633F58754}" type="datetimeFigureOut">
               <a:rPr lang="en-US" smtClean="0"/>
-              <a:t>12/9/2024</a:t>
+              <a:t>12/10/2024</a:t>
             </a:fld>
             <a:endParaRPr lang="en-US"/>
           </a:p>
@@ -7529,7 +7529,7 @@
           <a:p>
             <a:fld id="{D6D8061D-18C3-4F4F-85EF-561633F58754}" type="datetimeFigureOut">
               <a:rPr lang="en-US" smtClean="0"/>
-              <a:t>12/9/2024</a:t>
+              <a:t>12/10/2024</a:t>
             </a:fld>
             <a:endParaRPr lang="en-US"/>
           </a:p>
@@ -7737,7 +7737,7 @@
           <a:p>
             <a:fld id="{D6D8061D-18C3-4F4F-85EF-561633F58754}" type="datetimeFigureOut">
               <a:rPr lang="en-US" smtClean="0"/>
-              <a:t>12/9/2024</a:t>
+              <a:t>12/10/2024</a:t>
             </a:fld>
             <a:endParaRPr lang="en-US"/>
           </a:p>
@@ -8588,7 +8588,7 @@
           <a:p>
             <a:fld id="{D6D8061D-18C3-4F4F-85EF-561633F58754}" type="datetimeFigureOut">
               <a:rPr lang="en-US" smtClean="0"/>
-              <a:t>12/9/2024</a:t>
+              <a:t>12/10/2024</a:t>
             </a:fld>
             <a:endParaRPr lang="en-US"/>
           </a:p>
@@ -10602,7 +10602,7 @@
           <a:p>
             <a:fld id="{D6D8061D-18C3-4F4F-85EF-561633F58754}" type="datetimeFigureOut">
               <a:rPr lang="en-US" smtClean="0"/>
-              <a:t>12/9/2024</a:t>
+              <a:t>12/10/2024</a:t>
             </a:fld>
             <a:endParaRPr lang="en-US"/>
           </a:p>
@@ -11316,7 +11316,7 @@
           <a:p>
             <a:fld id="{D6D8061D-18C3-4F4F-85EF-561633F58754}" type="datetimeFigureOut">
               <a:rPr lang="en-US" smtClean="0"/>
-              <a:t>12/9/2024</a:t>
+              <a:t>12/10/2024</a:t>
             </a:fld>
             <a:endParaRPr lang="en-US"/>
           </a:p>
@@ -11765,7 +11765,7 @@
           <a:p>
             <a:fld id="{D6D8061D-18C3-4F4F-85EF-561633F58754}" type="datetimeFigureOut">
               <a:rPr lang="en-US" smtClean="0"/>
-              <a:t>12/9/2024</a:t>
+              <a:t>12/10/2024</a:t>
             </a:fld>
             <a:endParaRPr lang="en-US"/>
           </a:p>
@@ -11996,7 +11996,7 @@
           <a:p>
             <a:fld id="{D6D8061D-18C3-4F4F-85EF-561633F58754}" type="datetimeFigureOut">
               <a:rPr lang="en-US" smtClean="0"/>
-              <a:t>12/9/2024</a:t>
+              <a:t>12/10/2024</a:t>
             </a:fld>
             <a:endParaRPr lang="en-US"/>
           </a:p>
@@ -12636,7 +12636,7 @@
           <a:p>
             <a:fld id="{D6D8061D-18C3-4F4F-85EF-561633F58754}" type="datetimeFigureOut">
               <a:rPr lang="en-US" smtClean="0"/>
-              <a:t>12/9/2024</a:t>
+              <a:t>12/10/2024</a:t>
             </a:fld>
             <a:endParaRPr lang="en-US"/>
           </a:p>
@@ -13341,7 +13341,7 @@
           <a:p>
             <a:fld id="{D6D8061D-18C3-4F4F-85EF-561633F58754}" type="datetimeFigureOut">
               <a:rPr lang="en-US" smtClean="0"/>
-              <a:t>12/9/2024</a:t>
+              <a:t>12/10/2024</a:t>
             </a:fld>
             <a:endParaRPr lang="en-US"/>
           </a:p>
@@ -14291,7 +14291,7 @@
           <a:p>
             <a:fld id="{D6D8061D-18C3-4F4F-85EF-561633F58754}" type="datetimeFigureOut">
               <a:rPr lang="en-US" smtClean="0"/>
-              <a:t>12/9/2024</a:t>
+              <a:t>12/10/2024</a:t>
             </a:fld>
             <a:endParaRPr lang="en-US"/>
           </a:p>
@@ -14557,7 +14557,7 @@
           <a:p>
             <a:fld id="{D6D8061D-18C3-4F4F-85EF-561633F58754}" type="datetimeFigureOut">
               <a:rPr lang="en-US" smtClean="0"/>
-              <a:t>12/9/2024</a:t>
+              <a:t>12/10/2024</a:t>
             </a:fld>
             <a:endParaRPr lang="en-US"/>
           </a:p>
@@ -14974,7 +14974,7 @@
           <a:p>
             <a:fld id="{D6D8061D-18C3-4F4F-85EF-561633F58754}" type="datetimeFigureOut">
               <a:rPr lang="en-US" smtClean="0"/>
-              <a:t>12/9/2024</a:t>
+              <a:t>12/10/2024</a:t>
             </a:fld>
             <a:endParaRPr lang="en-US"/>
           </a:p>
@@ -15115,7 +15115,7 @@
           <a:p>
             <a:fld id="{D6D8061D-18C3-4F4F-85EF-561633F58754}" type="datetimeFigureOut">
               <a:rPr lang="en-US" smtClean="0"/>
-              <a:t>12/9/2024</a:t>
+              <a:t>12/10/2024</a:t>
             </a:fld>
             <a:endParaRPr lang="en-US"/>
           </a:p>
@@ -15228,7 +15228,7 @@
           <a:p>
             <a:fld id="{D6D8061D-18C3-4F4F-85EF-561633F58754}" type="datetimeFigureOut">
               <a:rPr lang="en-US" smtClean="0"/>
-              <a:t>12/9/2024</a:t>
+              <a:t>12/10/2024</a:t>
             </a:fld>
             <a:endParaRPr lang="en-US"/>
           </a:p>
@@ -15539,7 +15539,7 @@
           <a:p>
             <a:fld id="{D6D8061D-18C3-4F4F-85EF-561633F58754}" type="datetimeFigureOut">
               <a:rPr lang="en-US" smtClean="0"/>
-              <a:t>12/9/2024</a:t>
+              <a:t>12/10/2024</a:t>
             </a:fld>
             <a:endParaRPr lang="en-US"/>
           </a:p>
@@ -15830,7 +15830,7 @@
           <a:p>
             <a:fld id="{D6D8061D-18C3-4F4F-85EF-561633F58754}" type="datetimeFigureOut">
               <a:rPr lang="en-US" smtClean="0"/>
-              <a:t>12/9/2024</a:t>
+              <a:t>12/10/2024</a:t>
             </a:fld>
             <a:endParaRPr lang="en-US"/>
           </a:p>
@@ -16389,7 +16389,7 @@
           <a:p>
             <a:fld id="{D6D8061D-18C3-4F4F-85EF-561633F58754}" type="datetimeFigureOut">
               <a:rPr lang="en-US" smtClean="0"/>
-              <a:t>12/9/2024</a:t>
+              <a:t>12/10/2024</a:t>
             </a:fld>
             <a:endParaRPr lang="en-US"/>
           </a:p>
@@ -25602,26 +25602,6 @@
 </file>
 
 <file path=customXml/item1.xml><?xml version="1.0" encoding="utf-8"?>
-<p:properties xmlns:p="http://schemas.microsoft.com/office/2006/metadata/properties" xmlns:xsi="http://www.w3.org/2001/XMLSchema-instance" xmlns:pc="http://schemas.microsoft.com/office/infopath/2007/PartnerControls">
-  <documentManagement>
-    <_ip_UnifiedCompliancePolicyUIAction xmlns="http://schemas.microsoft.com/sharepoint/v3" xsi:nil="true"/>
-    <Image xmlns="71af3243-3dd4-4a8d-8c0d-dd76da1f02a5">
-      <Url xsi:nil="true"/>
-      <Description xsi:nil="true"/>
-    </Image>
-    <Status xmlns="71af3243-3dd4-4a8d-8c0d-dd76da1f02a5">Not started</Status>
-    <Background xmlns="71af3243-3dd4-4a8d-8c0d-dd76da1f02a5">false</Background>
-    <_ip_UnifiedCompliancePolicyProperties xmlns="http://schemas.microsoft.com/sharepoint/v3" xsi:nil="true"/>
-    <ImageTagsTaxHTField xmlns="71af3243-3dd4-4a8d-8c0d-dd76da1f02a5">
-      <Terms xmlns="http://schemas.microsoft.com/office/infopath/2007/PartnerControls"/>
-    </ImageTagsTaxHTField>
-    <TaxCatchAll xmlns="230e9df3-be65-4c73-a93b-d1236ebd677e" xsi:nil="true"/>
-    <MediaServiceKeyPoints xmlns="71af3243-3dd4-4a8d-8c0d-dd76da1f02a5" xsi:nil="true"/>
-  </documentManagement>
-</p:properties>
-</file>
-
-<file path=customXml/item2.xml><?xml version="1.0" encoding="utf-8"?>
 <ct:contentTypeSchema xmlns:ct="http://schemas.microsoft.com/office/2006/metadata/contentType" xmlns:ma="http://schemas.microsoft.com/office/2006/metadata/properties/metaAttributes" ct:_="" ma:_="" ma:contentTypeName="Document" ma:contentTypeID="0x01010079F111ED35F8CC479449609E8A0923A6" ma:contentTypeVersion="28" ma:contentTypeDescription="Create a new document." ma:contentTypeScope="" ma:versionID="60f5a4f2d2b0abadcf532d48ebf9cb71">
   <xsd:schema xmlns:xsd="http://www.w3.org/2001/XMLSchema" xmlns:xs="http://www.w3.org/2001/XMLSchema" xmlns:p="http://schemas.microsoft.com/office/2006/metadata/properties" xmlns:ns1="http://schemas.microsoft.com/sharepoint/v3" xmlns:ns2="71af3243-3dd4-4a8d-8c0d-dd76da1f02a5" xmlns:ns3="16c05727-aa75-4e4a-9b5f-8a80a1165891" xmlns:ns4="230e9df3-be65-4c73-a93b-d1236ebd677e" targetNamespace="http://schemas.microsoft.com/office/2006/metadata/properties" ma:root="true" ma:fieldsID="7dd78129e6a1811f84807ad11c651531" ns1:_="" ns2:_="" ns3:_="" ns4:_="">
     <xsd:import namespace="http://schemas.microsoft.com/sharepoint/v3"/>
@@ -25933,6 +25913,26 @@
 </ct:contentTypeSchema>
 </file>
 
+<file path=customXml/item2.xml><?xml version="1.0" encoding="utf-8"?>
+<p:properties xmlns:p="http://schemas.microsoft.com/office/2006/metadata/properties" xmlns:xsi="http://www.w3.org/2001/XMLSchema-instance" xmlns:pc="http://schemas.microsoft.com/office/infopath/2007/PartnerControls">
+  <documentManagement>
+    <_ip_UnifiedCompliancePolicyUIAction xmlns="http://schemas.microsoft.com/sharepoint/v3" xsi:nil="true"/>
+    <Image xmlns="71af3243-3dd4-4a8d-8c0d-dd76da1f02a5">
+      <Url xsi:nil="true"/>
+      <Description xsi:nil="true"/>
+    </Image>
+    <Status xmlns="71af3243-3dd4-4a8d-8c0d-dd76da1f02a5">Not started</Status>
+    <Background xmlns="71af3243-3dd4-4a8d-8c0d-dd76da1f02a5">false</Background>
+    <_ip_UnifiedCompliancePolicyProperties xmlns="http://schemas.microsoft.com/sharepoint/v3" xsi:nil="true"/>
+    <ImageTagsTaxHTField xmlns="71af3243-3dd4-4a8d-8c0d-dd76da1f02a5">
+      <Terms xmlns="http://schemas.microsoft.com/office/infopath/2007/PartnerControls"/>
+    </ImageTagsTaxHTField>
+    <TaxCatchAll xmlns="230e9df3-be65-4c73-a93b-d1236ebd677e" xsi:nil="true"/>
+    <MediaServiceKeyPoints xmlns="71af3243-3dd4-4a8d-8c0d-dd76da1f02a5" xsi:nil="true"/>
+  </documentManagement>
+</p:properties>
+</file>
+
 <file path=customXml/item3.xml><?xml version="1.0" encoding="utf-8"?>
 <?mso-contentType ?>
 <FormTemplates xmlns="http://schemas.microsoft.com/sharepoint/v3/contenttype/forms">
@@ -25943,18 +25943,6 @@
 </file>
 
 <file path=customXml/itemProps1.xml><?xml version="1.0" encoding="utf-8"?>
-<ds:datastoreItem xmlns:ds="http://schemas.openxmlformats.org/officeDocument/2006/customXml" ds:itemID="{3C20BE78-9FDF-401B-B412-3AA10EC5BEA3}">
-  <ds:schemaRefs>
-    <ds:schemaRef ds:uri="http://schemas.microsoft.com/office/2006/metadata/properties"/>
-    <ds:schemaRef ds:uri="http://schemas.microsoft.com/office/infopath/2007/PartnerControls"/>
-    <ds:schemaRef ds:uri="http://schemas.microsoft.com/sharepoint/v3"/>
-    <ds:schemaRef ds:uri="71af3243-3dd4-4a8d-8c0d-dd76da1f02a5"/>
-    <ds:schemaRef ds:uri="230e9df3-be65-4c73-a93b-d1236ebd677e"/>
-  </ds:schemaRefs>
-</ds:datastoreItem>
-</file>
-
-<file path=customXml/itemProps2.xml><?xml version="1.0" encoding="utf-8"?>
 <ds:datastoreItem xmlns:ds="http://schemas.openxmlformats.org/officeDocument/2006/customXml" ds:itemID="{1C180A77-4928-484F-9529-F716C85D6A6D}">
   <ds:schemaRefs>
     <ds:schemaRef ds:uri="http://schemas.microsoft.com/office/2006/metadata/contentType"/>
@@ -25975,6 +25963,18 @@
 </ds:datastoreItem>
 </file>
 
+<file path=customXml/itemProps2.xml><?xml version="1.0" encoding="utf-8"?>
+<ds:datastoreItem xmlns:ds="http://schemas.openxmlformats.org/officeDocument/2006/customXml" ds:itemID="{3C20BE78-9FDF-401B-B412-3AA10EC5BEA3}">
+  <ds:schemaRefs>
+    <ds:schemaRef ds:uri="http://schemas.microsoft.com/office/2006/metadata/properties"/>
+    <ds:schemaRef ds:uri="http://schemas.microsoft.com/office/infopath/2007/PartnerControls"/>
+    <ds:schemaRef ds:uri="http://schemas.microsoft.com/sharepoint/v3"/>
+    <ds:schemaRef ds:uri="71af3243-3dd4-4a8d-8c0d-dd76da1f02a5"/>
+    <ds:schemaRef ds:uri="230e9df3-be65-4c73-a93b-d1236ebd677e"/>
+  </ds:schemaRefs>
+</ds:datastoreItem>
+</file>
+
 <file path=customXml/itemProps3.xml><?xml version="1.0" encoding="utf-8"?>
 <ds:datastoreItem xmlns:ds="http://schemas.openxmlformats.org/officeDocument/2006/customXml" ds:itemID="{30E62E91-3991-445A-ADE0-DB143B39320F}">
   <ds:schemaRefs>
